--- a/social-media/decks/topic-05-how-a-lie-travels.pptx
+++ b/social-media/decks/topic-05-how-a-lie-travels.pptx
@@ -515,7 +515,7 @@
           <a:p>
             <a:r>
               <a:rPr lang="en-US" dirty="0"/>
-              <a:t>Open cold, without the word misinformation on the board. Read the deck line and stop. The question is not whether people lie, it is the speed difference between a claim and its correction. Say out loud that nobody is going to be asked today whether they personally fall for things.</a:t>
+              <a:t>Read the title and the subtitle, then stop. Say plainly what the lesson is about: not whether people lie online, but why false stories move faster than corrections do. Tell them nobody will be asked whether they personally believe things.</a:t>
             </a:r>
             <a:endParaRPr lang="en-US" dirty="0"/>
           </a:p>
@@ -603,7 +603,7 @@
           <a:p>
             <a:r>
               <a:rPr lang="en-US" dirty="0"/>
-              <a:t>This is the practical half of the block, so demonstrate it live rather than describing it. Take one claim, leave the page, open two tabs, and narrate what you are doing. The Stanford contrast is worth naming: the students were studying the things the page itself controls.</a:t>
+              <a:t>The practical half of the lesson. Do not describe lateral reading, demonstrate it: take one claim, leave the page, open two tabs, and say what you are doing as you do it. Then walk the five questions. The line at the bottom is the standard their written work is graded against.</a:t>
             </a:r>
             <a:endParaRPr lang="en-US" dirty="0"/>
           </a:p>
@@ -691,7 +691,7 @@
           <a:p>
             <a:r>
               <a:rPr lang="en-US" dirty="0"/>
-              <a:t>Do not skip this slide. It is the failure mode this course could accidentally teach, and the sharpest students are the ones most at risk of it. Doubting everything is not sophistication and it helps a campaign. Land on calibration, then on the one rule with the best return.</a:t>
+              <a:t>Do not skip this slide. The strongest students are the most likely to leave this lesson deciding that nothing can be trusted, which is not the goal and is genuinely useful to people who spread disinformation. Define calibration, then give the one habit that does most of the work.</a:t>
             </a:r>
             <a:endParaRPr lang="en-US" dirty="0"/>
           </a:p>
@@ -779,7 +779,7 @@
           <a:p>
             <a:r>
               <a:rPr lang="en-US" dirty="0"/>
-              <a:t>Fast pass, thirty seconds a card, because the Brief carries the detail. The two worth pausing on are procedure, because it changes turnout rather than opinion, and the regulation gap, because it is the handoff to Topic 6: nobody voted on those policies.</a:t>
+              <a:t>Fast pass, about thirty seconds each, because the Brief carries the detail. Pause on false voting information, because it changes whether people vote rather than who they support, and on the advertising rules, which is the handoff to Topic 6.</a:t>
             </a:r>
             <a:endParaRPr lang="en-US" dirty="0"/>
           </a:p>
@@ -867,7 +867,7 @@
           <a:p>
             <a:r>
               <a:rPr lang="en-US" dirty="0"/>
-              <a:t>Model intellectual honesty here. The echo chamber is the explanation they have heard most and it is the shakiest thing in the block. Point at the Facebook affiliation and ask what to do about it: read it carefully, not throw it out. Then flag that somebody will propose exactly this fix in Topic 6.</a:t>
+              <a:t>Model honesty about evidence here. The echo chamber is the explanation they have heard most often and it is the least settled thing in the lesson. Point out that the 2015 study authors worked at Facebook, and ask what a careful reader does with that: read it closely, not throw it away.</a:t>
             </a:r>
             <a:endParaRPr lang="en-US" dirty="0"/>
           </a:p>
@@ -955,7 +955,7 @@
           <a:p>
             <a:r>
               <a:rPr lang="en-US" dirty="0"/>
-              <a:t>Read the takeaway, then set the three questions. Both cards under each question in the Brief are real answers, so say that out loud, and say the confidence rating is not graded. Last thing on the way out: tomorrow you get asked who should be allowed to do this.</a:t>
+              <a:t>Read the summary, then set the three questions. Say out loud that Start Here and Push Further are both real answers, and that the confidence rating is not graded. On the way out, tell them tomorrow they get asked who should be allowed to run these systems.</a:t>
             </a:r>
             <a:endParaRPr lang="en-US" dirty="0"/>
           </a:p>
@@ -1043,7 +1043,7 @@
           <a:p>
             <a:r>
               <a:rPr lang="en-US" dirty="0"/>
-              <a:t>Two minutes. Point back at their own work: the chain from Topic 1 and the ranking number from Topic 3 are the two things today rests on. Read the Reading Target aloud, because it is the whole assessment: check a claim in under two minutes and SAY what you checked.</a:t>
+              <a:t>Two minutes. Connect it to work they have already done, because today only makes sense on top of Topic 1 and Topic 3. Read the goal at the bottom out loud, twice: check a claim in about two minutes, and be able to say what you checked.</a:t>
             </a:r>
             <a:endParaRPr lang="en-US" dirty="0"/>
           </a:p>
@@ -1131,7 +1131,7 @@
           <a:p>
             <a:r>
               <a:rPr lang="en-US" dirty="0"/>
-              <a:t>This is the distinction the rest of the block runs on, so do not rush it. Same words on the screen, different sender. Ask for a case where they could not tell which one they were looking at, and let the answer be "you often cannot."</a:t>
+              <a:t>This is the distinction the rest of the lesson uses, so do not rush it. Say the two definitions slowly and write both words on the board. Ask for one example of each. If they cannot tell which one they are looking at, that is the correct answer and worth saying.</a:t>
             </a:r>
             <a:endParaRPr lang="en-US" dirty="0"/>
           </a:p>
@@ -1219,7 +1219,7 @@
           <a:p>
             <a:r>
               <a:rPr lang="en-US" dirty="0"/>
-              <a:t>Spend most of the time on the third card. Ask for a headline where every fact underneath was true and the headline still misled. If nobody has one, use one from the week's reading. Name it framing, and say it is far more common than outright invention.</a:t>
+              <a:t>Three forms, about a minute each. Spend the extra time on the third one, because it is the one they will meet most often. Show a real headline if you have one, and ask what it makes a reader believe that the article itself does not say.</a:t>
             </a:r>
             <a:endParaRPr lang="en-US" dirty="0"/>
           </a:p>
@@ -1307,7 +1307,7 @@
           <a:p>
             <a:r>
               <a:rPr lang="en-US" dirty="0"/>
-              <a:t>The point of this case is trust, not the market. The account was one people had reason to believe, which is why one sentence moved money in seconds. Note the recovery too: corrections do work, they are just slower and quieter than the claim.</a:t>
+              <a:t>This example is about trust, not about the stock market. The account was one people had reason to believe, so the false post traveled before anyone checked it. Point out the recovery as well: corrections do work, but they arrive later and quieter.</a:t>
             </a:r>
             <a:endParaRPr lang="en-US" dirty="0"/>
           </a:p>
@@ -1395,7 +1395,7 @@
           <a:p>
             <a:r>
               <a:rPr lang="en-US" dirty="0"/>
-              <a:t>Four cards, four minutes. Do not moralize. Bots is the one they usually have backwards, so press it: the network is not there to persuade anyone, it is there to manufacture the look of consensus. End on Emotion and let the last line land: naming the feeling is the counter, and it takes four seconds.</a:t>
+              <a:t>Four tactics, four minutes. Bots are the one students usually get wrong, so be direct: a bot network is not trying to convince you, it is trying to make a claim look popular. End on emotion, because it is the tactic that carries the other three.</a:t>
             </a:r>
             <a:endParaRPr lang="en-US" dirty="0"/>
           </a:p>
@@ -1483,7 +1483,7 @@
           <a:p>
             <a:r>
               <a:rPr lang="en-US" dirty="0"/>
-              <a:t>This is the intellectual center of the block. Walk the chain left to right and make them supply the third box. Nobody at the company decided to promote a lie; the number did it. If a student says "so it is not their fault", that is the setup for Topic 6, so hold it rather than answering it.</a:t>
+              <a:t>This is the most important slide in the lesson. Walk the three steps left to right and have a student supply the third one. Nobody at the company decides to spread a lie; the ranking system measures reaction. If a student says that means the company is not responsible, hold that thought for Topic 6 rather than answering it.</a:t>
             </a:r>
             <a:endParaRPr lang="en-US" dirty="0"/>
           </a:p>
@@ -1571,7 +1571,7 @@
           <a:p>
             <a:r>
               <a:rPr lang="en-US" dirty="0"/>
-              <a:t>Slow down here. Give them the design of the study before the finding: 126,000 cascades, eleven years, then the move that makes it matter, which is removing the bots and getting the same answer. Ask what that implies before you say it. The last line is theirs to arrive at.</a:t>
+              <a:t>Slow down. Give the design of the study before the result: how many rumors, how many years. Then the result. Then the second step, where the researchers removed the automated accounts and got the same answer. Ask what that tells us before you say it.</a:t>
             </a:r>
             <a:endParaRPr lang="en-US" dirty="0"/>
           </a:p>
@@ -1659,7 +1659,7 @@
           <a:p>
             <a:r>
               <a:rPr lang="en-US" dirty="0"/>
-              <a:t>Two cases, and they do different jobs. Veles kills the assumption that this is always ideological: it was advertising money. Pizzagate is the consequence case, and deliver it flatly. The Watch For is the important part for this room: the comfortable explanations are the ones that put the problem outside it.</a:t>
+              <a:t>Two examples doing two jobs. Veles shows that the motive is often money rather than politics. Pizzagate shows that a false story with no evidence behind it can still move somebody to act. Deliver the second one plainly, without drama.</a:t>
             </a:r>
             <a:endParaRPr lang="en-US" dirty="0"/>
           </a:p>
@@ -2186,7 +2186,7 @@
         <p:spPr>
           <a:xfrm>
             <a:off x="548640" y="2286000"/>
-            <a:ext cx="6858000" cy="822960"/>
+            <a:ext cx="6858000" cy="457200"/>
           </a:xfrm>
           <a:prstGeom prst="rect">
             <a:avLst/>
@@ -2200,12 +2200,12 @@
           <a:p>
             <a:pPr algn="l" indent="0" marL="0">
               <a:lnSpc>
-                <a:spcPct val="115000"/>
-              </a:lnSpc>
-              <a:buNone/>
-            </a:pPr>
-            <a:r>
-              <a:rPr lang="en-US" sz="1700" i="1" dirty="0">
+                <a:spcPct val="106000"/>
+              </a:lnSpc>
+              <a:buNone/>
+            </a:pPr>
+            <a:r>
+              <a:rPr lang="en-US" sz="1800" i="1" dirty="0">
                 <a:solidFill>
                   <a:srgbClr val="A8B2BA"/>
                 </a:solidFill>
@@ -2213,9 +2213,9 @@
                 <a:ea typeface="Cambria" pitchFamily="34" charset="-122"/>
                 <a:cs typeface="Cambria" pitchFamily="34" charset="-120"/>
               </a:rPr>
-              <a:t>The interesting question is not whether people lie online. It is why the lie moves faster than the correction.</a:t>
-            </a:r>
-            <a:endParaRPr lang="en-US" sz="1700" dirty="0"/>
+              <a:t>Why false stories spread faster than corrections do.</a:t>
+            </a:r>
+            <a:endParaRPr lang="en-US" sz="1800" dirty="0"/>
           </a:p>
         </p:txBody>
       </p:sp>
@@ -2227,7 +2227,7 @@
         </p:nvSpPr>
         <p:spPr>
           <a:xfrm>
-            <a:off x="548640" y="3401568"/>
+            <a:off x="548640" y="3108960"/>
             <a:ext cx="1371600" cy="329184"/>
           </a:xfrm>
           <a:prstGeom prst="roundRect">
@@ -2254,7 +2254,7 @@
         </p:nvSpPr>
         <p:spPr>
           <a:xfrm>
-            <a:off x="548640" y="3401568"/>
+            <a:off x="548640" y="3108960"/>
             <a:ext cx="1371600" cy="329184"/>
           </a:xfrm>
           <a:prstGeom prst="rect">
@@ -2296,7 +2296,7 @@
         </p:nvSpPr>
         <p:spPr>
           <a:xfrm>
-            <a:off x="2121408" y="3401568"/>
+            <a:off x="2121408" y="3108960"/>
             <a:ext cx="1920240" cy="329184"/>
           </a:xfrm>
           <a:prstGeom prst="roundRect">
@@ -2323,7 +2323,7 @@
         </p:nvSpPr>
         <p:spPr>
           <a:xfrm>
-            <a:off x="2121408" y="3401568"/>
+            <a:off x="2121408" y="3108960"/>
             <a:ext cx="1920240" cy="329184"/>
           </a:xfrm>
           <a:prstGeom prst="rect">
@@ -2503,7 +2503,7 @@
                 <a:ea typeface="Cambria" pitchFamily="34" charset="-122"/>
                 <a:cs typeface="Cambria" pitchFamily="34" charset="-120"/>
               </a:rPr>
-              <a:t>Lateral reading, about ninety seconds</a:t>
+              <a:t>How to check a claim: lateral reading</a:t>
             </a:r>
             <a:endParaRPr lang="en-US" sz="3000" dirty="0"/>
           </a:p>
@@ -2579,7 +2579,7 @@
                 <a:ea typeface="Calibri" pitchFamily="34" charset="-122"/>
                 <a:cs typeface="Calibri" pitchFamily="34" charset="-120"/>
               </a:rPr>
-              <a:t>Instead of studying the page you landed on, harder and harder, you leave it. Open new tabs and find out what other sources say about whoever published it.</a:t>
+              <a:t>Lateral reading means leaving the page you are on. Instead of studying that page, you open new tabs and find out what other sources say about whoever published it.</a:t>
             </a:r>
             <a:endParaRPr lang="en-US" sz="1300" dirty="0"/>
           </a:p>
@@ -2621,7 +2621,7 @@
                 <a:ea typeface="Courier New" pitchFamily="34" charset="-122"/>
                 <a:cs typeface="Courier New" pitchFamily="34" charset="-120"/>
               </a:rPr>
-              <a:t>STANFORD</a:t>
+              <a:t>A STANFORD STUDY</a:t>
             </a:r>
             <a:endParaRPr lang="en-US" sz="900" dirty="0"/>
           </a:p>
@@ -2636,7 +2636,7 @@
         <p:spPr>
           <a:xfrm>
             <a:off x="786384" y="2980944"/>
-            <a:ext cx="3182112" cy="713232"/>
+            <a:ext cx="3182112" cy="749808"/>
           </a:xfrm>
           <a:prstGeom prst="rect">
             <a:avLst/>
@@ -2663,7 +2663,7 @@
                 <a:ea typeface="Calibri" pitchFamily="34" charset="-122"/>
                 <a:cs typeface="Calibri" pitchFamily="34" charset="-120"/>
               </a:rPr>
-              <a:t>The professional fact checkers left the page almost immediately. The students stayed on it, examining its design, its logo and its About section, all of which the page controls.</a:t>
+              <a:t>Professional fact-checkers left the page almost immediately. Students stayed on it and studied the design, the logo and the About section, which are all controlled by the page itself.</a:t>
             </a:r>
             <a:endParaRPr lang="en-US" sz="1200" dirty="0"/>
           </a:p>
@@ -2875,7 +2875,7 @@
                 <a:ea typeface="Calibri" pitchFamily="34" charset="-122"/>
                 <a:cs typeface="Calibri" pitchFamily="34" charset="-120"/>
               </a:rPr>
-              <a:t>When? Old stories recirculate as new ones constantly.</a:t>
+              <a:t>When was it published? Old stories are often reshared as new ones.</a:t>
             </a:r>
             <a:endParaRPr lang="en-US" sz="1250" dirty="0"/>
           </a:p>
@@ -2981,7 +2981,7 @@
                 <a:ea typeface="Calibri" pitchFamily="34" charset="-122"/>
                 <a:cs typeface="Calibri" pitchFamily="34" charset="-120"/>
               </a:rPr>
-              <a:t>Does anybody else report it? If only one outlet has it, why?</a:t>
+              <a:t>Does any other source report it? If only one does, ask why.</a:t>
             </a:r>
             <a:endParaRPr lang="en-US" sz="1250" dirty="0"/>
           </a:p>
@@ -3087,7 +3087,7 @@
                 <a:ea typeface="Calibri" pitchFamily="34" charset="-122"/>
                 <a:cs typeface="Calibri" pitchFamily="34" charset="-120"/>
               </a:rPr>
-              <a:t>What is the earliest version? The one you saw is several hands down the chain.</a:t>
+              <a:t>What is the earliest version you can find?</a:t>
             </a:r>
             <a:endParaRPr lang="en-US" sz="1250" dirty="0"/>
           </a:p>
@@ -3193,7 +3193,7 @@
                 <a:ea typeface="Calibri" pitchFamily="34" charset="-122"/>
                 <a:cs typeface="Calibri" pitchFamily="34" charset="-120"/>
               </a:rPr>
-              <a:t>For a photograph, a reverse image search.</a:t>
+              <a:t>For a photo, run a reverse image search.</a:t>
             </a:r>
             <a:endParaRPr lang="en-US" sz="1250" dirty="0"/>
           </a:p>
@@ -3261,7 +3261,7 @@
               <a:buNone/>
             </a:pPr>
             <a:r>
-              <a:rPr lang="en-US" sz="1300" dirty="0">
+              <a:rPr lang="en-US" sz="1350" dirty="0">
                 <a:solidFill>
                   <a:srgbClr val="14171A"/>
                 </a:solidFill>
@@ -3269,9 +3269,9 @@
                 <a:ea typeface="Calibri" pitchFamily="34" charset="-122"/>
                 <a:cs typeface="Calibri" pitchFamily="34" charset="-120"/>
               </a:rPr>
-              <a:t>"I do not believe it" is not a check. A check names what you looked at, and it can end in uncertainty and still be finished work.</a:t>
-            </a:r>
-            <a:endParaRPr lang="en-US" sz="1300" dirty="0"/>
+              <a:t>Saying "I do not believe it" is not checking. Checking means naming what you looked at.</a:t>
+            </a:r>
+            <a:endParaRPr lang="en-US" sz="1350" dirty="0"/>
           </a:p>
         </p:txBody>
       </p:sp>
@@ -3379,7 +3379,7 @@
                 <a:ea typeface="Courier New" pitchFamily="34" charset="-122"/>
                 <a:cs typeface="Courier New" pitchFamily="34" charset="-120"/>
               </a:rPr>
-              <a:t>PART FOUR · THE FAILURE MODE</a:t>
+              <a:t>PART FOUR · A WARNING</a:t>
             </a:r>
             <a:endParaRPr lang="en-US" sz="1000" dirty="0"/>
           </a:p>
@@ -3421,7 +3421,7 @@
                 <a:ea typeface="Cambria" pitchFamily="34" charset="-122"/>
                 <a:cs typeface="Cambria" pitchFamily="34" charset="-120"/>
               </a:rPr>
-              <a:t>Doubting everything is not media literacy</a:t>
+              <a:t>Doubting everything is not the goal</a:t>
             </a:r>
             <a:endParaRPr lang="en-US" sz="3000" dirty="0"/>
           </a:p>
@@ -3436,11 +3436,11 @@
         <p:spPr>
           <a:xfrm>
             <a:off x="548640" y="1554480"/>
-            <a:ext cx="3840480" cy="1463040"/>
+            <a:ext cx="3840480" cy="1554480"/>
           </a:xfrm>
           <a:prstGeom prst="roundRect">
             <a:avLst>
-              <a:gd name="adj" fmla="val 3750"/>
+              <a:gd name="adj" fmla="val 3529"/>
             </a:avLst>
           </a:prstGeom>
           <a:solidFill>
@@ -3497,7 +3497,7 @@
                 <a:ea typeface="Courier New" pitchFamily="34" charset="-122"/>
                 <a:cs typeface="Courier New" pitchFamily="34" charset="-120"/>
               </a:rPr>
-              <a:t>THE TRAP</a:t>
+              <a:t>THE PROBLEM</a:t>
             </a:r>
             <a:endParaRPr lang="en-US" sz="900" dirty="0"/>
           </a:p>
@@ -3512,7 +3512,7 @@
         <p:spPr>
           <a:xfrm>
             <a:off x="804672" y="2066544"/>
-            <a:ext cx="3328416" cy="822960"/>
+            <a:ext cx="3328416" cy="914400"/>
           </a:xfrm>
           <a:prstGeom prst="rect">
             <a:avLst/>
@@ -3526,12 +3526,12 @@
           <a:p>
             <a:pPr algn="l" indent="0" marL="0">
               <a:lnSpc>
-                <a:spcPct val="114000"/>
-              </a:lnSpc>
-              <a:buNone/>
-            </a:pPr>
-            <a:r>
-              <a:rPr lang="en-US" sz="1300" dirty="0">
+                <a:spcPct val="112000"/>
+              </a:lnSpc>
+              <a:buNone/>
+            </a:pPr>
+            <a:r>
+              <a:rPr lang="en-US" sz="1250" dirty="0">
                 <a:solidFill>
                   <a:srgbClr val="14171A"/>
                 </a:solidFill>
@@ -3539,9 +3539,9 @@
                 <a:ea typeface="Calibri" pitchFamily="34" charset="-122"/>
                 <a:cs typeface="Calibri" pitchFamily="34" charset="-120"/>
               </a:rPr>
-              <a:t>It is paralysis. And it is genuinely useful to anyone running a disinformation campaign: if nothing can be established, nothing they say can be disproved.</a:t>
-            </a:r>
-            <a:endParaRPr lang="en-US" sz="1300" dirty="0"/>
+              <a:t>If you decide that nothing can be trusted, you cannot learn anything. That also helps people who spread disinformation: if nothing can be proven, nothing they say can be disproven.</a:t>
+            </a:r>
+            <a:endParaRPr lang="en-US" sz="1250" dirty="0"/>
           </a:p>
         </p:txBody>
       </p:sp>
@@ -3554,11 +3554,11 @@
         <p:spPr>
           <a:xfrm>
             <a:off x="4754880" y="1554480"/>
-            <a:ext cx="3840480" cy="1463040"/>
+            <a:ext cx="3840480" cy="1554480"/>
           </a:xfrm>
           <a:prstGeom prst="roundRect">
             <a:avLst>
-              <a:gd name="adj" fmla="val 3750"/>
+              <a:gd name="adj" fmla="val 3529"/>
             </a:avLst>
           </a:prstGeom>
           <a:solidFill>
@@ -3630,7 +3630,7 @@
         <p:spPr>
           <a:xfrm>
             <a:off x="5010912" y="2066544"/>
-            <a:ext cx="3328416" cy="822960"/>
+            <a:ext cx="3328416" cy="914400"/>
           </a:xfrm>
           <a:prstGeom prst="rect">
             <a:avLst/>
@@ -3644,12 +3644,12 @@
           <a:p>
             <a:pPr algn="l" indent="0" marL="0">
               <a:lnSpc>
-                <a:spcPct val="114000"/>
-              </a:lnSpc>
-              <a:buNone/>
-            </a:pPr>
-            <a:r>
-              <a:rPr lang="en-US" sz="1300" dirty="0">
+                <a:spcPct val="112000"/>
+              </a:lnSpc>
+              <a:buNone/>
+            </a:pPr>
+            <a:r>
+              <a:rPr lang="en-US" sz="1250" dirty="0">
                 <a:solidFill>
                   <a:srgbClr val="14171A"/>
                 </a:solidFill>
@@ -3657,9 +3657,9 @@
                 <a:ea typeface="Calibri" pitchFamily="34" charset="-122"/>
                 <a:cs typeface="Calibri" pitchFamily="34" charset="-120"/>
               </a:rPr>
-              <a:t>Calibration. Believing things in proportion to the evidence, rather than suspicion of everything.</a:t>
-            </a:r>
-            <a:endParaRPr lang="en-US" sz="1300" dirty="0"/>
+              <a:t>Calibration. This means believing a claim in proportion to the evidence for it, rather than doubting everything equally.</a:t>
+            </a:r>
+            <a:endParaRPr lang="en-US" sz="1250" dirty="0"/>
           </a:p>
         </p:txBody>
       </p:sp>
@@ -3705,7 +3705,7 @@
         </p:nvSpPr>
         <p:spPr>
           <a:xfrm>
-            <a:off x="804672" y="3383280"/>
+            <a:off x="804672" y="3364992"/>
             <a:ext cx="7534656" cy="310896"/>
           </a:xfrm>
           <a:prstGeom prst="rect">
@@ -3733,7 +3733,7 @@
                 <a:ea typeface="Cambria" pitchFamily="34" charset="-122"/>
                 <a:cs typeface="Cambria" pitchFamily="34" charset="-120"/>
               </a:rPr>
-              <a:t>Do not pass along something you have not checked.</a:t>
+              <a:t>Do not share something you have not checked.</a:t>
             </a:r>
             <a:endParaRPr lang="en-US" sz="1900" dirty="0"/>
           </a:p>
@@ -3748,7 +3748,7 @@
         <p:spPr>
           <a:xfrm>
             <a:off x="804672" y="3712464"/>
-            <a:ext cx="7534656" cy="365760"/>
+            <a:ext cx="7534656" cy="402336"/>
           </a:xfrm>
           <a:prstGeom prst="rect">
             <a:avLst/>
@@ -3775,7 +3775,7 @@
                 <a:ea typeface="Calibri" pitchFamily="34" charset="-122"/>
                 <a:cs typeface="Calibri" pitchFamily="34" charset="-120"/>
               </a:rPr>
-              <a:t>That is not offered as a moral rule. Part Three is the reason: you are part of the distribution system, measurably, and it is the largest part.</a:t>
+              <a:t>This is one habit, and it does most of the work. It is not a rule about being a good person. Part Three is the reason: people do most of the spreading, so what you share matters.</a:t>
             </a:r>
             <a:endParaRPr lang="en-US" sz="1300" dirty="0"/>
           </a:p>
@@ -3927,7 +3927,7 @@
                 <a:ea typeface="Cambria" pitchFamily="34" charset="-122"/>
                 <a:cs typeface="Cambria" pitchFamily="34" charset="-120"/>
               </a:rPr>
-              <a:t>In an election, all of it runs at once</a:t>
+              <a:t>In an election, these appear together</a:t>
             </a:r>
             <a:endParaRPr lang="en-US" sz="3000" dirty="0"/>
           </a:p>
@@ -3995,7 +3995,7 @@
               <a:buNone/>
             </a:pPr>
             <a:r>
-              <a:rPr lang="en-US" sz="1350" b="1" dirty="0">
+              <a:rPr lang="en-US" sz="1300" b="1" dirty="0">
                 <a:solidFill>
                   <a:srgbClr val="14171A"/>
                 </a:solidFill>
@@ -4003,9 +4003,9 @@
                 <a:ea typeface="Cambria" pitchFamily="34" charset="-122"/>
                 <a:cs typeface="Cambria" pitchFamily="34" charset="-120"/>
               </a:rPr>
-              <a:t>Voting procedure</a:t>
-            </a:r>
-            <a:endParaRPr lang="en-US" sz="1350" dirty="0"/>
+              <a:t>False voting information</a:t>
+            </a:r>
+            <a:endParaRPr lang="en-US" sz="1300" dirty="0"/>
           </a:p>
         </p:txBody>
       </p:sp>
@@ -4045,7 +4045,7 @@
                 <a:ea typeface="Calibri" pitchFamily="34" charset="-122"/>
                 <a:cs typeface="Calibri" pitchFamily="34" charset="-120"/>
               </a:rPr>
-              <a:t>Wrong date, invented ID rules, a moved polling place. It changes whether you show up.</a:t>
+              <a:t>A wrong date, invented ID rules, or a polling place that moved. This changes whether people vote.</a:t>
             </a:r>
             <a:endParaRPr lang="en-US" sz="1150" dirty="0"/>
           </a:p>
@@ -4113,7 +4113,7 @@
               <a:buNone/>
             </a:pPr>
             <a:r>
-              <a:rPr lang="en-US" sz="1350" b="1" dirty="0">
+              <a:rPr lang="en-US" sz="1300" b="1" dirty="0">
                 <a:solidFill>
                   <a:srgbClr val="14171A"/>
                 </a:solidFill>
@@ -4123,7 +4123,7 @@
               </a:rPr>
               <a:t>Foreign interference</a:t>
             </a:r>
-            <a:endParaRPr lang="en-US" sz="1350" dirty="0"/>
+            <a:endParaRPr lang="en-US" sz="1300" dirty="0"/>
           </a:p>
         </p:txBody>
       </p:sp>
@@ -4163,7 +4163,7 @@
                 <a:ea typeface="Calibri" pitchFamily="34" charset="-122"/>
                 <a:cs typeface="Calibri" pitchFamily="34" charset="-120"/>
               </a:rPr>
-              <a:t>2018: thirteen Russian nationals and the IRA indicted. The described aim was widening divisions.</a:t>
+              <a:t>In 2018 a US grand jury charged 13 Russian nationals with running fake American accounts in 2016.</a:t>
             </a:r>
             <a:endParaRPr lang="en-US" sz="1150" dirty="0"/>
           </a:p>
@@ -4231,7 +4231,7 @@
               <a:buNone/>
             </a:pPr>
             <a:r>
-              <a:rPr lang="en-US" sz="1350" b="1" dirty="0">
+              <a:rPr lang="en-US" sz="1300" b="1" dirty="0">
                 <a:solidFill>
                   <a:srgbClr val="14171A"/>
                 </a:solidFill>
@@ -4241,7 +4241,7 @@
               </a:rPr>
               <a:t>Microtargeting</a:t>
             </a:r>
-            <a:endParaRPr lang="en-US" sz="1350" dirty="0"/>
+            <a:endParaRPr lang="en-US" sz="1300" dirty="0"/>
           </a:p>
         </p:txBody>
       </p:sp>
@@ -4281,7 +4281,7 @@
                 <a:ea typeface="Calibri" pitchFamily="34" charset="-122"/>
                 <a:cs typeface="Calibri" pitchFamily="34" charset="-120"/>
               </a:rPr>
-              <a:t>Two voters get different promises from one campaign, and neither sees the other's.</a:t>
+              <a:t>Campaigns pay to show different messages to different small groups of voters.</a:t>
             </a:r>
             <a:endParaRPr lang="en-US" sz="1150" dirty="0"/>
           </a:p>
@@ -4349,7 +4349,7 @@
               <a:buNone/>
             </a:pPr>
             <a:r>
-              <a:rPr lang="en-US" sz="1350" b="1" dirty="0">
+              <a:rPr lang="en-US" sz="1300" b="1" dirty="0">
                 <a:solidFill>
                   <a:srgbClr val="14171A"/>
                 </a:solidFill>
@@ -4359,7 +4359,7 @@
               </a:rPr>
               <a:t>Echo chambers</a:t>
             </a:r>
-            <a:endParaRPr lang="en-US" sz="1350" dirty="0"/>
+            <a:endParaRPr lang="en-US" sz="1300" dirty="0"/>
           </a:p>
         </p:txBody>
       </p:sp>
@@ -4399,7 +4399,7 @@
                 <a:ea typeface="Calibri" pitchFamily="34" charset="-122"/>
                 <a:cs typeface="Calibri" pitchFamily="34" charset="-120"/>
               </a:rPr>
-              <a:t>Ranking narrows what you see. Hold it loosely: the research is least settled here.</a:t>
+              <a:t>The idea that ranking shows you mostly people who agree with you. The evidence here is weakest.</a:t>
             </a:r>
             <a:endParaRPr lang="en-US" sz="1150" dirty="0"/>
           </a:p>
@@ -4467,7 +4467,7 @@
               <a:buNone/>
             </a:pPr>
             <a:r>
-              <a:rPr lang="en-US" sz="1350" b="1" dirty="0">
+              <a:rPr lang="en-US" sz="1300" b="1" dirty="0">
                 <a:solidFill>
                   <a:srgbClr val="14171A"/>
                 </a:solidFill>
@@ -4477,7 +4477,7 @@
               </a:rPr>
               <a:t>Polarization</a:t>
             </a:r>
-            <a:endParaRPr lang="en-US" sz="1350" dirty="0"/>
+            <a:endParaRPr lang="en-US" sz="1300" dirty="0"/>
           </a:p>
         </p:txBody>
       </p:sp>
@@ -4517,7 +4517,7 @@
                 <a:ea typeface="Calibri" pitchFamily="34" charset="-122"/>
                 <a:cs typeface="Calibri" pitchFamily="34" charset="-120"/>
               </a:rPr>
-              <a:t>Attacking the other side outperforms explaining your own, in every direction at once.</a:t>
+              <a:t>Posts attacking the other side get more reaction than posts explaining your own side.</a:t>
             </a:r>
             <a:endParaRPr lang="en-US" sz="1150" dirty="0"/>
           </a:p>
@@ -4585,7 +4585,7 @@
               <a:buNone/>
             </a:pPr>
             <a:r>
-              <a:rPr lang="en-US" sz="1350" b="1" dirty="0">
+              <a:rPr lang="en-US" sz="1300" b="1" dirty="0">
                 <a:solidFill>
                   <a:srgbClr val="14171A"/>
                 </a:solidFill>
@@ -4593,9 +4593,9 @@
                 <a:ea typeface="Cambria" pitchFamily="34" charset="-122"/>
                 <a:cs typeface="Cambria" pitchFamily="34" charset="-120"/>
               </a:rPr>
-              <a:t>The regulation gap</a:t>
-            </a:r>
-            <a:endParaRPr lang="en-US" sz="1350" dirty="0"/>
+              <a:t>Advertising rules</a:t>
+            </a:r>
+            <a:endParaRPr lang="en-US" sz="1300" dirty="0"/>
           </a:p>
         </p:txBody>
       </p:sp>
@@ -4635,7 +4635,7 @@
                 <a:ea typeface="Calibri" pitchFamily="34" charset="-122"/>
                 <a:cs typeface="Calibri" pitchFamily="34" charset="-120"/>
               </a:rPr>
-              <a:t>Broadcast ad rules do not cover platforms. Company policy does, and nobody voted on it.</a:t>
+              <a:t>US political ad rules were written for television. Most platform rules are written by the companies.</a:t>
             </a:r>
             <a:endParaRPr lang="en-US" sz="1150" dirty="0"/>
           </a:p>
@@ -4677,7 +4677,7 @@
                 <a:ea typeface="Calibri" pitchFamily="34" charset="-122"/>
                 <a:cs typeface="Calibri" pitchFamily="34" charset="-120"/>
               </a:rPr>
-              <a:t>"Social media decided the election" is a claim about size, and nobody has good evidence for it. Every mechanism above is documented. How much any of it moves an outcome is not.</a:t>
+              <a:t>Each of these is documented. How much any of them changes the result of an election is still being argued about, in both directions.</a:t>
             </a:r>
             <a:endParaRPr lang="en-US" sz="1250" dirty="0"/>
           </a:p>
@@ -4821,7 +4821,7 @@
               <a:buNone/>
             </a:pPr>
             <a:r>
-              <a:rPr lang="en-US" sz="2600" b="1" dirty="0">
+              <a:rPr lang="en-US" sz="3000" b="1" dirty="0">
                 <a:solidFill>
                   <a:srgbClr val="14171A"/>
                 </a:solidFill>
@@ -4829,9 +4829,9 @@
                 <a:ea typeface="Cambria" pitchFamily="34" charset="-122"/>
                 <a:cs typeface="Cambria" pitchFamily="34" charset="-120"/>
               </a:rPr>
-              <a:t>The echo chamber is the part that might be wrong</a:t>
-            </a:r>
-            <a:endParaRPr lang="en-US" sz="2600" dirty="0"/>
+              <a:t>The echo chamber idea may be wrong</a:t>
+            </a:r>
+            <a:endParaRPr lang="en-US" sz="3000" dirty="0"/>
           </a:p>
         </p:txBody>
       </p:sp>
@@ -4875,7 +4875,7 @@
                 <a:ea typeface="Calibri" pitchFamily="34" charset="-122"/>
                 <a:cs typeface="Calibri" pitchFamily="34" charset="-120"/>
               </a:rPr>
-              <a:t>Eli Pariser named the filter bubble in 2011. It is repeated so often that it sounds like a finding. It is a theory, and it has taken real damage.</a:t>
+              <a:t>Eli Pariser named the "filter bubble" in 2011. The idea is repeated so often that it sounds like a proven fact. It is a theory.</a:t>
             </a:r>
             <a:endParaRPr lang="en-US" sz="1250" dirty="0"/>
           </a:p>
@@ -4899,7 +4899,7 @@
                 <a:ea typeface="Calibri" pitchFamily="34" charset="-122"/>
                 <a:cs typeface="Calibri" pitchFamily="34" charset="-120"/>
               </a:rPr>
-              <a:t>Measured news diets keep coming out more varied than the theory predicts, and the sealed-in partisans turn out to be a small share of users.</a:t>
+              <a:t>When researchers measured what people actually read, they found more variety than the theory predicts, and found that heavily sealed-off users are a small group.</a:t>
             </a:r>
             <a:endParaRPr lang="en-US" sz="1250" dirty="0"/>
           </a:p>
@@ -4923,7 +4923,7 @@
                 <a:ea typeface="Calibri" pitchFamily="34" charset="-122"/>
                 <a:cs typeface="Calibri" pitchFamily="34" charset="-120"/>
               </a:rPr>
-              <a:t>A 2015 Science study by Bakshy, Messing and Adamic found that on Facebook individual clicks mattered more than the ranking did. The authors worked for Facebook: read it carefully, do not throw it out. Noticing that difference is the skill.</a:t>
+              <a:t>A 2015 study in Science found that on Facebook, people's own choices about what to click mattered more than the ranking did. The authors worked for Facebook. That is a reason to read the study closely, not a reason to ignore it.</a:t>
             </a:r>
             <a:endParaRPr lang="en-US" sz="1250" dirty="0"/>
           </a:p>
@@ -4999,7 +4999,7 @@
                 <a:ea typeface="Courier New" pitchFamily="34" charset="-122"/>
                 <a:cs typeface="Courier New" pitchFamily="34" charset="-120"/>
               </a:rPr>
-              <a:t>WHY IT MATTERS</a:t>
+              <a:t>WHY THIS MATTERS</a:t>
             </a:r>
             <a:endParaRPr lang="en-US" sz="900" dirty="0"/>
           </a:p>
@@ -5014,7 +5014,7 @@
         <p:spPr>
           <a:xfrm>
             <a:off x="5650992" y="2048256"/>
-            <a:ext cx="2688336" cy="1097280"/>
+            <a:ext cx="2688336" cy="1188720"/>
           </a:xfrm>
           <a:prstGeom prst="rect">
             <a:avLst/>
@@ -5041,7 +5041,7 @@
                 <a:ea typeface="Calibri" pitchFamily="34" charset="-122"/>
                 <a:cs typeface="Calibri" pitchFamily="34" charset="-120"/>
               </a:rPr>
-              <a:t>The two stories point at different fixes. If ranking causes the bubble, changing the ranking helps. If people choose it, changing the ranking does very little.</a:t>
+              <a:t>The two explanations point to different solutions. If the ranking causes the problem, changing the ranking helps. If people's own choices cause it, changing the ranking does very little.</a:t>
             </a:r>
             <a:endParaRPr lang="en-US" sz="1250" dirty="0"/>
           </a:p>
@@ -5055,8 +5055,8 @@
         </p:nvSpPr>
         <p:spPr>
           <a:xfrm>
-            <a:off x="5650992" y="3255264"/>
-            <a:ext cx="2688336" cy="457200"/>
+            <a:off x="5650992" y="3310128"/>
+            <a:ext cx="2688336" cy="365760"/>
           </a:xfrm>
           <a:prstGeom prst="rect">
             <a:avLst/>
@@ -5070,7 +5070,7 @@
           <a:p>
             <a:pPr algn="l" indent="0" marL="0">
               <a:lnSpc>
-                <a:spcPct val="110000"/>
+                <a:spcPct val="106000"/>
               </a:lnSpc>
               <a:buNone/>
             </a:pPr>
@@ -5083,7 +5083,7 @@
                 <a:ea typeface="Calibri" pitchFamily="34" charset="-122"/>
                 <a:cs typeface="Calibri" pitchFamily="34" charset="-120"/>
               </a:rPr>
-              <a:t>Keep that in your pocket for Topic 6.</a:t>
+              <a:t>Remember this for Topic 6.</a:t>
             </a:r>
             <a:endParaRPr lang="en-US" sz="1300" dirty="0"/>
           </a:p>
@@ -5125,7 +5125,7 @@
                 <a:ea typeface="Calibri" pitchFamily="34" charset="-122"/>
                 <a:cs typeface="Calibri" pitchFamily="34" charset="-120"/>
               </a:rPr>
-              <a:t>The rival explanation is that the bubble is mostly offline: who you live near, who you are related to, and who you talk to in person, none of which an algorithm chose.</a:t>
+              <a:t>A third explanation is that the bubble is mostly offline: who you live near, who you are related to, and who you talk to in person. No algorithm chose any of those.</a:t>
             </a:r>
             <a:endParaRPr lang="en-US" sz="1250" dirty="0"/>
           </a:p>
@@ -5235,7 +5235,7 @@
                 <a:ea typeface="Courier New" pitchFamily="34" charset="-122"/>
                 <a:cs typeface="Courier New" pitchFamily="34" charset="-120"/>
               </a:rPr>
-              <a:t>BEREADY · 10-SECOND TAKEAWAY</a:t>
+              <a:t>SUMMARY</a:t>
             </a:r>
             <a:endParaRPr lang="en-US" sz="1000" dirty="0"/>
           </a:p>
@@ -5277,7 +5277,7 @@
                 <a:ea typeface="Cambria" pitchFamily="34" charset="-122"/>
                 <a:cs typeface="Cambria" pitchFamily="34" charset="-120"/>
               </a:rPr>
-              <a:t>False things travel because they are new and they make you feel something. People rather than bots do most of the carrying.</a:t>
+              <a:t>False stories spread because they are new and because they produce strong emotions. Most of the spreading is done by people, not bots.</a:t>
             </a:r>
             <a:endParaRPr lang="en-US" sz="1850" dirty="0"/>
           </a:p>
@@ -5292,11 +5292,11 @@
         <p:spPr>
           <a:xfrm>
             <a:off x="548640" y="1627632"/>
-            <a:ext cx="8046720" cy="2304288"/>
+            <a:ext cx="8046720" cy="2340864"/>
           </a:xfrm>
           <a:prstGeom prst="roundRect">
             <a:avLst>
-              <a:gd name="adj" fmla="val 2381"/>
+              <a:gd name="adj" fmla="val 2344"/>
             </a:avLst>
           </a:prstGeom>
           <a:solidFill>
@@ -5346,7 +5346,7 @@
                 <a:ea typeface="Courier New" pitchFamily="34" charset="-122"/>
                 <a:cs typeface="Courier New" pitchFamily="34" charset="-120"/>
               </a:rPr>
-              <a:t>CHECK YOUR UNDERSTANDING</a:t>
+              <a:t>WHAT YOU WILL WRITE</a:t>
             </a:r>
             <a:endParaRPr lang="en-US" sz="900" dirty="0"/>
           </a:p>
@@ -5467,7 +5467,7 @@
         <p:spPr>
           <a:xfrm>
             <a:off x="1243584" y="2359152"/>
-            <a:ext cx="7040880" cy="402336"/>
+            <a:ext cx="7040880" cy="420624"/>
           </a:xfrm>
           <a:prstGeom prst="rect">
             <a:avLst/>
@@ -5494,7 +5494,7 @@
                 <a:ea typeface="Calibri" pitchFamily="34" charset="-122"/>
                 <a:cs typeface="Calibri" pitchFamily="34" charset="-120"/>
               </a:rPr>
-              <a:t>Pick something you saw this week that made you feel something strongly. Name the feeling, and explain how that feeling helped the thing travel.</a:t>
+              <a:t>Describe one post you saw this week that produced a strong emotion. Name the emotion, then explain how it made people more likely to share the post.</a:t>
             </a:r>
             <a:endParaRPr lang="en-US" sz="1200" dirty="0"/>
           </a:p>
@@ -5508,7 +5508,7 @@
         </p:nvSpPr>
         <p:spPr>
           <a:xfrm>
-            <a:off x="804672" y="2779776"/>
+            <a:off x="804672" y="2798064"/>
             <a:ext cx="310896" cy="310896"/>
           </a:xfrm>
           <a:prstGeom prst="ellipse">
@@ -5533,7 +5533,7 @@
         </p:nvSpPr>
         <p:spPr>
           <a:xfrm>
-            <a:off x="804672" y="2779776"/>
+            <a:off x="804672" y="2798064"/>
             <a:ext cx="310896" cy="310896"/>
           </a:xfrm>
           <a:prstGeom prst="rect">
@@ -5572,7 +5572,7 @@
         </p:nvSpPr>
         <p:spPr>
           <a:xfrm>
-            <a:off x="1243584" y="2761488"/>
+            <a:off x="1243584" y="2779776"/>
             <a:ext cx="7040880" cy="201168"/>
           </a:xfrm>
           <a:prstGeom prst="rect">
@@ -5614,8 +5614,8 @@
         </p:nvSpPr>
         <p:spPr>
           <a:xfrm>
-            <a:off x="1243584" y="2962656"/>
-            <a:ext cx="7040880" cy="402336"/>
+            <a:off x="1243584" y="2980944"/>
+            <a:ext cx="7040880" cy="420624"/>
           </a:xfrm>
           <a:prstGeom prst="rect">
             <a:avLst/>
@@ -5642,7 +5642,7 @@
                 <a:ea typeface="Calibri" pitchFamily="34" charset="-122"/>
                 <a:cs typeface="Calibri" pitchFamily="34" charset="-120"/>
               </a:rPr>
-              <a:t>Take one claim you are not sure about and check it laterally. Write down what you did: who published it, when, and who else reports it.</a:t>
+              <a:t>Choose one claim you are unsure about and check it using lateral reading. Write down who published it, when, and whether another source reports it.</a:t>
             </a:r>
             <a:endParaRPr lang="en-US" sz="1200" dirty="0"/>
           </a:p>
@@ -5656,7 +5656,7 @@
         </p:nvSpPr>
         <p:spPr>
           <a:xfrm>
-            <a:off x="804672" y="3383280"/>
+            <a:off x="804672" y="3419856"/>
             <a:ext cx="310896" cy="310896"/>
           </a:xfrm>
           <a:prstGeom prst="ellipse">
@@ -5681,7 +5681,7 @@
         </p:nvSpPr>
         <p:spPr>
           <a:xfrm>
-            <a:off x="804672" y="3383280"/>
+            <a:off x="804672" y="3419856"/>
             <a:ext cx="310896" cy="310896"/>
           </a:xfrm>
           <a:prstGeom prst="rect">
@@ -5720,7 +5720,7 @@
         </p:nvSpPr>
         <p:spPr>
           <a:xfrm>
-            <a:off x="1243584" y="3364992"/>
+            <a:off x="1243584" y="3401568"/>
             <a:ext cx="7040880" cy="201168"/>
           </a:xfrm>
           <a:prstGeom prst="rect">
@@ -5762,8 +5762,8 @@
         </p:nvSpPr>
         <p:spPr>
           <a:xfrm>
-            <a:off x="1243584" y="3566160"/>
-            <a:ext cx="7040880" cy="402336"/>
+            <a:off x="1243584" y="3602736"/>
+            <a:ext cx="7040880" cy="420624"/>
           </a:xfrm>
           <a:prstGeom prst="rect">
             <a:avLst/>
@@ -5790,7 +5790,7 @@
                 <a:ea typeface="Calibri" pitchFamily="34" charset="-122"/>
                 <a:cs typeface="Calibri" pitchFamily="34" charset="-120"/>
               </a:rPr>
-              <a:t>Pick one item from Part Five and explain the mechanism, step by step: how would it actually change an election?</a:t>
+              <a:t>Choose one item from Part Five. Explain, in three steps, how it could change the result of an election.</a:t>
             </a:r>
             <a:endParaRPr lang="en-US" sz="1200" dirty="0"/>
           </a:p>
@@ -5804,7 +5804,7 @@
         </p:nvSpPr>
         <p:spPr>
           <a:xfrm>
-            <a:off x="548640" y="4096512"/>
+            <a:off x="548640" y="4114800"/>
             <a:ext cx="7863840" cy="402336"/>
           </a:xfrm>
           <a:prstGeom prst="rect">
@@ -5832,7 +5832,7 @@
                 <a:ea typeface="Calibri" pitchFamily="34" charset="-122"/>
                 <a:cs typeface="Calibri" pitchFamily="34" charset="-120"/>
               </a:rPr>
-              <a:t>Both cards under every question are real answers. Rate your confidence honestly: a Shaky tells your teacher more than a dishonest Could teach it.</a:t>
+              <a:t>Each question has a Start Here card and a Push Further card. Both are real answers. Your confidence rating is not graded.</a:t>
             </a:r>
             <a:endParaRPr lang="en-US" sz="1250" dirty="0"/>
           </a:p>
@@ -5976,7 +5976,7 @@
               <a:buNone/>
             </a:pPr>
             <a:r>
-              <a:rPr lang="en-US" sz="2700" b="1" dirty="0">
+              <a:rPr lang="en-US" sz="3000" b="1" dirty="0">
                 <a:solidFill>
                   <a:srgbClr val="14171A"/>
                 </a:solidFill>
@@ -5984,9 +5984,9 @@
                 <a:ea typeface="Cambria" pitchFamily="34" charset="-122"/>
                 <a:cs typeface="Cambria" pitchFamily="34" charset="-120"/>
               </a:rPr>
-              <a:t>You know the machine. Now what it rewards.</a:t>
-            </a:r>
-            <a:endParaRPr lang="en-US" sz="2700" dirty="0"/>
+              <a:t>What today builds on</a:t>
+            </a:r>
+            <a:endParaRPr lang="en-US" sz="3000" dirty="0"/>
           </a:p>
         </p:txBody>
       </p:sp>
@@ -6132,7 +6132,7 @@
                 <a:ea typeface="Calibri" pitchFamily="34" charset="-122"/>
                 <a:cs typeface="Calibri" pitchFamily="34" charset="-120"/>
               </a:rPr>
-              <a:t>The click is what pays. You drew that chain yourself.</a:t>
+              <a:t>Apps make money when people keep looking at them.</a:t>
             </a:r>
             <a:endParaRPr lang="en-US" sz="1300" dirty="0"/>
           </a:p>
@@ -6146,7 +6146,7 @@
         </p:nvSpPr>
         <p:spPr>
           <a:xfrm>
-            <a:off x="548640" y="2578608"/>
+            <a:off x="548640" y="2560320"/>
             <a:ext cx="402336" cy="402336"/>
           </a:xfrm>
           <a:prstGeom prst="ellipse">
@@ -6171,7 +6171,7 @@
         </p:nvSpPr>
         <p:spPr>
           <a:xfrm>
-            <a:off x="548640" y="2578608"/>
+            <a:off x="548640" y="2560320"/>
             <a:ext cx="402336" cy="402336"/>
           </a:xfrm>
           <a:prstGeom prst="rect">
@@ -6210,7 +6210,7 @@
         </p:nvSpPr>
         <p:spPr>
           <a:xfrm>
-            <a:off x="1097280" y="2560320"/>
+            <a:off x="1097280" y="2542032"/>
             <a:ext cx="3566160" cy="237744"/>
           </a:xfrm>
           <a:prstGeom prst="rect">
@@ -6252,7 +6252,7 @@
         </p:nvSpPr>
         <p:spPr>
           <a:xfrm>
-            <a:off x="1097280" y="2798064"/>
+            <a:off x="1097280" y="2779776"/>
             <a:ext cx="3566160" cy="475488"/>
           </a:xfrm>
           <a:prstGeom prst="rect">
@@ -6280,7 +6280,7 @@
                 <a:ea typeface="Calibri" pitchFamily="34" charset="-122"/>
                 <a:cs typeface="Calibri" pitchFamily="34" charset="-120"/>
               </a:rPr>
-              <a:t>The feed is optimized for a number somebody chose.</a:t>
+              <a:t>The feed ranks posts to produce the most reaction.</a:t>
             </a:r>
             <a:endParaRPr lang="en-US" sz="1300" dirty="0"/>
           </a:p>
@@ -6294,7 +6294,7 @@
         </p:nvSpPr>
         <p:spPr>
           <a:xfrm>
-            <a:off x="548640" y="3419856"/>
+            <a:off x="548640" y="3383280"/>
             <a:ext cx="402336" cy="402336"/>
           </a:xfrm>
           <a:prstGeom prst="ellipse">
@@ -6319,7 +6319,7 @@
         </p:nvSpPr>
         <p:spPr>
           <a:xfrm>
-            <a:off x="548640" y="3419856"/>
+            <a:off x="548640" y="3383280"/>
             <a:ext cx="402336" cy="402336"/>
           </a:xfrm>
           <a:prstGeom prst="rect">
@@ -6358,7 +6358,7 @@
         </p:nvSpPr>
         <p:spPr>
           <a:xfrm>
-            <a:off x="1097280" y="3401568"/>
+            <a:off x="1097280" y="3364992"/>
             <a:ext cx="3566160" cy="237744"/>
           </a:xfrm>
           <a:prstGeom prst="rect">
@@ -6400,7 +6400,7 @@
         </p:nvSpPr>
         <p:spPr>
           <a:xfrm>
-            <a:off x="1097280" y="3639312"/>
+            <a:off x="1097280" y="3602736"/>
             <a:ext cx="3566160" cy="475488"/>
           </a:xfrm>
           <a:prstGeom prst="rect">
@@ -6428,7 +6428,7 @@
                 <a:ea typeface="Calibri" pitchFamily="34" charset="-122"/>
                 <a:cs typeface="Calibri" pitchFamily="34" charset="-120"/>
               </a:rPr>
-              <a:t>What that number rewards, and who builds for it deliberately.</a:t>
+              <a:t>Which posts get the most reaction, and who uses that on purpose.</a:t>
             </a:r>
             <a:endParaRPr lang="en-US" sz="1300" dirty="0"/>
           </a:p>
@@ -6443,11 +6443,11 @@
         <p:spPr>
           <a:xfrm>
             <a:off x="4937760" y="1682496"/>
-            <a:ext cx="3657600" cy="2432304"/>
+            <a:ext cx="3657600" cy="2377440"/>
           </a:xfrm>
           <a:prstGeom prst="roundRect">
             <a:avLst>
-              <a:gd name="adj" fmla="val 2256"/>
+              <a:gd name="adj" fmla="val 2308"/>
             </a:avLst>
           </a:prstGeom>
           <a:solidFill>
@@ -6504,7 +6504,7 @@
                 <a:ea typeface="Courier New" pitchFamily="34" charset="-122"/>
                 <a:cs typeface="Courier New" pitchFamily="34" charset="-120"/>
               </a:rPr>
-              <a:t>READING TARGET</a:t>
+              <a:t>YOUR GOAL TODAY</a:t>
             </a:r>
             <a:endParaRPr lang="en-US" sz="900" dirty="0"/>
           </a:p>
@@ -6546,7 +6546,7 @@
                 <a:ea typeface="Calibri" pitchFamily="34" charset="-122"/>
                 <a:cs typeface="Calibri" pitchFamily="34" charset="-120"/>
               </a:rPr>
-              <a:t>Check a claim you are unsure about in under two minutes, and say out loud what you checked, rather than that you did not believe it.</a:t>
+              <a:t>Check a claim you are unsure about in about two minutes, and be able to say what you checked.</a:t>
             </a:r>
             <a:endParaRPr lang="en-US" sz="1450" dirty="0"/>
           </a:p>
@@ -6698,7 +6698,7 @@
                 <a:ea typeface="Cambria" pitchFamily="34" charset="-122"/>
                 <a:cs typeface="Cambria" pitchFamily="34" charset="-120"/>
               </a:rPr>
-              <a:t>Two words. The difference is the sender.</a:t>
+              <a:t>Two words for false information</a:t>
             </a:r>
             <a:endParaRPr lang="en-US" sz="3000" dirty="0"/>
           </a:p>
@@ -6816,7 +6816,7 @@
                 <a:ea typeface="Calibri" pitchFamily="34" charset="-122"/>
                 <a:cs typeface="Calibri" pitchFamily="34" charset="-120"/>
               </a:rPr>
-              <a:t>False information spread by somebody who thinks it is true.</a:t>
+              <a:t>False information shared by someone who believes it is true.</a:t>
             </a:r>
             <a:endParaRPr lang="en-US" sz="1400" dirty="0"/>
           </a:p>
@@ -6934,7 +6934,7 @@
                 <a:ea typeface="Calibri" pitchFamily="34" charset="-122"/>
                 <a:cs typeface="Calibri" pitchFamily="34" charset="-120"/>
               </a:rPr>
-              <a:t>False information spread by somebody who knows it is false.</a:t>
+              <a:t>False information shared by someone who knows it is false.</a:t>
             </a:r>
             <a:endParaRPr lang="en-US" sz="1400" dirty="0"/>
           </a:p>
@@ -6976,7 +6976,7 @@
                 <a:ea typeface="Cambria" pitchFamily="34" charset="-122"/>
                 <a:cs typeface="Cambria" pitchFamily="34" charset="-120"/>
               </a:rPr>
-              <a:t>Identical content. Different sender. Your response should be different.</a:t>
+              <a:t>The post can look identical. The difference is what the sender knows.</a:t>
             </a:r>
             <a:endParaRPr lang="en-US" sz="1900" dirty="0"/>
           </a:p>
@@ -6991,7 +6991,7 @@
         <p:spPr>
           <a:xfrm>
             <a:off x="548640" y="3566160"/>
-            <a:ext cx="7315200" cy="548640"/>
+            <a:ext cx="7680960" cy="548640"/>
           </a:xfrm>
           <a:prstGeom prst="rect">
             <a:avLst/>
@@ -7018,7 +7018,7 @@
                 <a:ea typeface="Calibri" pitchFamily="34" charset="-122"/>
                 <a:cs typeface="Calibri" pitchFamily="34" charset="-120"/>
               </a:rPr>
-              <a:t>You can correct a person who is mistaken. You cannot correct a campaign, because being wrong was the plan.</a:t>
+              <a:t>You can correct a person who made a mistake. You cannot correct a person who is lying on purpose, because being wrong was the plan.</a:t>
             </a:r>
             <a:endParaRPr lang="en-US" sz="1400" dirty="0"/>
           </a:p>
@@ -7128,7 +7128,7 @@
                 <a:ea typeface="Courier New" pitchFamily="34" charset="-122"/>
                 <a:cs typeface="Courier New" pitchFamily="34" charset="-120"/>
               </a:rPr>
-              <a:t>PART ONE · THE SHAPES</a:t>
+              <a:t>PART ONE · THE THREE FORMS</a:t>
             </a:r>
             <a:endParaRPr lang="en-US" sz="1000" dirty="0"/>
           </a:p>
@@ -7170,7 +7170,7 @@
                 <a:ea typeface="Cambria" pitchFamily="34" charset="-122"/>
                 <a:cs typeface="Cambria" pitchFamily="34" charset="-120"/>
               </a:rPr>
-              <a:t>Three shapes it arrives in</a:t>
+              <a:t>Three forms false information takes</a:t>
             </a:r>
             <a:endParaRPr lang="en-US" sz="3000" dirty="0"/>
           </a:p>
@@ -7283,7 +7283,7 @@
         <p:spPr>
           <a:xfrm>
             <a:off x="786384" y="2212848"/>
-            <a:ext cx="2084832" cy="256032"/>
+            <a:ext cx="2084832" cy="274320"/>
           </a:xfrm>
           <a:prstGeom prst="rect">
             <a:avLst/>
@@ -7302,7 +7302,7 @@
               <a:buNone/>
             </a:pPr>
             <a:r>
-              <a:rPr lang="en-US" sz="1500" b="1" dirty="0">
+              <a:rPr lang="en-US" sz="1450" b="1" dirty="0">
                 <a:solidFill>
                   <a:srgbClr val="14171A"/>
                 </a:solidFill>
@@ -7310,9 +7310,9 @@
                 <a:ea typeface="Cambria" pitchFamily="34" charset="-122"/>
                 <a:cs typeface="Cambria" pitchFamily="34" charset="-120"/>
               </a:rPr>
-              <a:t>Viral hoax</a:t>
-            </a:r>
-            <a:endParaRPr lang="en-US" sz="1500" dirty="0"/>
+              <a:t>Invented story</a:t>
+            </a:r>
+            <a:endParaRPr lang="en-US" sz="1450" dirty="0"/>
           </a:p>
         </p:txBody>
       </p:sp>
@@ -7324,8 +7324,8 @@
         </p:nvSpPr>
         <p:spPr>
           <a:xfrm>
-            <a:off x="786384" y="2523744"/>
-            <a:ext cx="2084832" cy="676656"/>
+            <a:off x="786384" y="2560320"/>
+            <a:ext cx="2084832" cy="731520"/>
           </a:xfrm>
           <a:prstGeom prst="rect">
             <a:avLst/>
@@ -7352,7 +7352,7 @@
                 <a:ea typeface="Calibri" pitchFamily="34" charset="-122"/>
                 <a:cs typeface="Calibri" pitchFamily="34" charset="-120"/>
               </a:rPr>
-              <a:t>A story that is simply invented.</a:t>
+              <a:t>A story about an event that never happened.</a:t>
             </a:r>
             <a:endParaRPr lang="en-US" sz="1250" dirty="0"/>
           </a:p>
@@ -7465,7 +7465,7 @@
         <p:spPr>
           <a:xfrm>
             <a:off x="3529584" y="2212848"/>
-            <a:ext cx="2084832" cy="256032"/>
+            <a:ext cx="2084832" cy="274320"/>
           </a:xfrm>
           <a:prstGeom prst="rect">
             <a:avLst/>
@@ -7484,7 +7484,7 @@
               <a:buNone/>
             </a:pPr>
             <a:r>
-              <a:rPr lang="en-US" sz="1500" b="1" dirty="0">
+              <a:rPr lang="en-US" sz="1450" b="1" dirty="0">
                 <a:solidFill>
                   <a:srgbClr val="14171A"/>
                 </a:solidFill>
@@ -7492,9 +7492,9 @@
                 <a:ea typeface="Cambria" pitchFamily="34" charset="-122"/>
                 <a:cs typeface="Cambria" pitchFamily="34" charset="-120"/>
               </a:rPr>
-              <a:t>Doctored image</a:t>
-            </a:r>
-            <a:endParaRPr lang="en-US" sz="1500" dirty="0"/>
+              <a:t>Fake image</a:t>
+            </a:r>
+            <a:endParaRPr lang="en-US" sz="1450" dirty="0"/>
           </a:p>
         </p:txBody>
       </p:sp>
@@ -7506,8 +7506,8 @@
         </p:nvSpPr>
         <p:spPr>
           <a:xfrm>
-            <a:off x="3529584" y="2523744"/>
-            <a:ext cx="2084832" cy="676656"/>
+            <a:off x="3529584" y="2560320"/>
+            <a:ext cx="2084832" cy="731520"/>
           </a:xfrm>
           <a:prstGeom prst="rect">
             <a:avLst/>
@@ -7534,7 +7534,7 @@
                 <a:ea typeface="Calibri" pitchFamily="34" charset="-122"/>
                 <a:cs typeface="Calibri" pitchFamily="34" charset="-120"/>
               </a:rPr>
-              <a:t>Edited, and now often generated outright rather than edited at all.</a:t>
+              <a:t>A photo or video that was edited, or created by software.</a:t>
             </a:r>
             <a:endParaRPr lang="en-US" sz="1250" dirty="0"/>
           </a:p>
@@ -7647,7 +7647,7 @@
         <p:spPr>
           <a:xfrm>
             <a:off x="6272784" y="2212848"/>
-            <a:ext cx="2084832" cy="256032"/>
+            <a:ext cx="2084832" cy="274320"/>
           </a:xfrm>
           <a:prstGeom prst="rect">
             <a:avLst/>
@@ -7666,7 +7666,7 @@
               <a:buNone/>
             </a:pPr>
             <a:r>
-              <a:rPr lang="en-US" sz="1500" b="1" dirty="0">
+              <a:rPr lang="en-US" sz="1450" b="1" dirty="0">
                 <a:solidFill>
                   <a:srgbClr val="14171A"/>
                 </a:solidFill>
@@ -7676,7 +7676,7 @@
               </a:rPr>
               <a:t>Misleading headline</a:t>
             </a:r>
-            <a:endParaRPr lang="en-US" sz="1500" dirty="0"/>
+            <a:endParaRPr lang="en-US" sz="1450" dirty="0"/>
           </a:p>
         </p:txBody>
       </p:sp>
@@ -7688,8 +7688,8 @@
         </p:nvSpPr>
         <p:spPr>
           <a:xfrm>
-            <a:off x="6272784" y="2523744"/>
-            <a:ext cx="2084832" cy="676656"/>
+            <a:off x="6272784" y="2560320"/>
+            <a:ext cx="2084832" cy="731520"/>
           </a:xfrm>
           <a:prstGeom prst="rect">
             <a:avLst/>
@@ -7716,7 +7716,7 @@
                 <a:ea typeface="Calibri" pitchFamily="34" charset="-122"/>
                 <a:cs typeface="Calibri" pitchFamily="34" charset="-120"/>
               </a:rPr>
-              <a:t>Every fact underneath it can be true while the headline still leaves you believing something false.</a:t>
+              <a:t>Every fact in the article is true, but the headline makes you believe something false.</a:t>
             </a:r>
             <a:endParaRPr lang="en-US" sz="1250" dirty="0"/>
           </a:p>
@@ -7750,7 +7750,7 @@
               <a:buNone/>
             </a:pPr>
             <a:r>
-              <a:rPr lang="en-US" sz="1600" b="1" dirty="0">
+              <a:rPr lang="en-US" sz="1700" b="1" dirty="0">
                 <a:solidFill>
                   <a:srgbClr val="14171A"/>
                 </a:solidFill>
@@ -7758,9 +7758,9 @@
                 <a:ea typeface="Cambria" pitchFamily="34" charset="-122"/>
                 <a:cs typeface="Cambria" pitchFamily="34" charset="-120"/>
               </a:rPr>
-              <a:t>The third is the sneakiest, and much the most common: that is framing, not invention.</a:t>
-            </a:r>
-            <a:endParaRPr lang="en-US" sz="1600" dirty="0"/>
+              <a:t>The third form is the most common and the hardest to notice.</a:t>
+            </a:r>
+            <a:endParaRPr lang="en-US" sz="1700" dirty="0"/>
           </a:p>
         </p:txBody>
       </p:sp>
@@ -7792,7 +7792,7 @@
               <a:buNone/>
             </a:pPr>
             <a:r>
-              <a:rPr lang="en-US" sz="1300" i="1" dirty="0">
+              <a:rPr lang="en-US" sz="1300" dirty="0">
                 <a:solidFill>
                   <a:srgbClr val="3C444C"/>
                 </a:solidFill>
@@ -7800,7 +7800,7 @@
                 <a:ea typeface="Calibri" pitchFamily="34" charset="-122"/>
                 <a:cs typeface="Calibri" pitchFamily="34" charset="-120"/>
               </a:rPr>
-              <a:t>Sourcing starts before the content. Who sent this, and do they know whether it is true?</a:t>
+              <a:t>Before you judge a post, ask who sent it, and whether that person knows if it is true.</a:t>
             </a:r>
             <a:endParaRPr lang="en-US" sz="1300" dirty="0"/>
           </a:p>
@@ -7910,7 +7910,7 @@
                 <a:ea typeface="Courier New" pitchFamily="34" charset="-122"/>
                 <a:cs typeface="Courier New" pitchFamily="34" charset="-120"/>
               </a:rPr>
-              <a:t>APRIL 2013</a:t>
+              <a:t>APRIL 2013 · AN EXAMPLE</a:t>
             </a:r>
             <a:endParaRPr lang="en-US" sz="1000" dirty="0"/>
           </a:p>
@@ -7952,7 +7952,7 @@
                 <a:ea typeface="Cambria" pitchFamily="34" charset="-122"/>
                 <a:cs typeface="Cambria" pitchFamily="34" charset="-120"/>
               </a:rPr>
-              <a:t>One fake sentence, from an account people had reason to trust</a:t>
+              <a:t>One false sentence from a trusted account</a:t>
             </a:r>
             <a:endParaRPr lang="en-US" sz="3000" dirty="0"/>
           </a:p>
@@ -8000,8 +8000,8 @@
         </p:nvSpPr>
         <p:spPr>
           <a:xfrm>
-            <a:off x="804672" y="1810512"/>
-            <a:ext cx="4242816" cy="1691640"/>
+            <a:off x="804672" y="1792224"/>
+            <a:ext cx="4242816" cy="1737360"/>
           </a:xfrm>
           <a:prstGeom prst="rect">
             <a:avLst/>
@@ -8018,13 +8018,13 @@
                 <a:spcPct val="104000"/>
               </a:lnSpc>
               <a:spcAft>
-                <a:spcPts val="900"/>
+                <a:spcPts val="800"/>
               </a:spcAft>
               <a:buSzPct val="100000"/>
               <a:buChar char="•"/>
             </a:pPr>
             <a:r>
-              <a:rPr lang="en-US" sz="1350" dirty="0">
+              <a:rPr lang="en-US" sz="1300" dirty="0">
                 <a:solidFill>
                   <a:srgbClr val="3C444C"/>
                 </a:solidFill>
@@ -8032,9 +8032,9 @@
                 <a:ea typeface="Calibri" pitchFamily="34" charset="-122"/>
                 <a:cs typeface="Calibri" pitchFamily="34" charset="-120"/>
               </a:rPr>
-              <a:t>The Associated Press Twitter account was hacked.</a:t>
-            </a:r>
-            <a:endParaRPr lang="en-US" sz="1350" dirty="0"/>
+              <a:t>Hackers took control of the Associated Press Twitter account.</a:t>
+            </a:r>
+            <a:endParaRPr lang="en-US" sz="1300" dirty="0"/>
           </a:p>
           <a:p>
             <a:pPr marL="177800" indent="-177800">
@@ -8042,13 +8042,13 @@
                 <a:spcPct val="104000"/>
               </a:lnSpc>
               <a:spcAft>
-                <a:spcPts val="900"/>
+                <a:spcPts val="800"/>
               </a:spcAft>
               <a:buSzPct val="100000"/>
               <a:buChar char="•"/>
             </a:pPr>
             <a:r>
-              <a:rPr lang="en-US" sz="1350" dirty="0">
+              <a:rPr lang="en-US" sz="1300" dirty="0">
                 <a:solidFill>
                   <a:srgbClr val="3C444C"/>
                 </a:solidFill>
@@ -8056,9 +8056,9 @@
                 <a:ea typeface="Calibri" pitchFamily="34" charset="-122"/>
                 <a:cs typeface="Calibri" pitchFamily="34" charset="-120"/>
               </a:rPr>
-              <a:t>It posted that there had been explosions at the White House and that the president was injured.</a:t>
-            </a:r>
-            <a:endParaRPr lang="en-US" sz="1350" dirty="0"/>
+              <a:t>They posted that there had been explosions at the White House and that the president was injured.</a:t>
+            </a:r>
+            <a:endParaRPr lang="en-US" sz="1300" dirty="0"/>
           </a:p>
           <a:p>
             <a:pPr marL="177800" indent="-177800">
@@ -8066,13 +8066,13 @@
                 <a:spcPct val="104000"/>
               </a:lnSpc>
               <a:spcAft>
-                <a:spcPts val="900"/>
+                <a:spcPts val="800"/>
               </a:spcAft>
               <a:buSzPct val="100000"/>
               <a:buChar char="•"/>
             </a:pPr>
             <a:r>
-              <a:rPr lang="en-US" sz="1350" dirty="0">
+              <a:rPr lang="en-US" sz="1300" dirty="0">
                 <a:solidFill>
                   <a:srgbClr val="3C444C"/>
                 </a:solidFill>
@@ -8080,9 +8080,9 @@
                 <a:ea typeface="Calibri" pitchFamily="34" charset="-122"/>
                 <a:cs typeface="Calibri" pitchFamily="34" charset="-120"/>
               </a:rPr>
-              <a:t>The stock market dropped sharply within seconds.</a:t>
-            </a:r>
-            <a:endParaRPr lang="en-US" sz="1350" dirty="0"/>
+              <a:t>Neither of those things had happened.</a:t>
+            </a:r>
+            <a:endParaRPr lang="en-US" sz="1300" dirty="0"/>
           </a:p>
           <a:p>
             <a:pPr marL="177800" indent="-177800">
@@ -8090,13 +8090,13 @@
                 <a:spcPct val="104000"/>
               </a:lnSpc>
               <a:spcAft>
-                <a:spcPts val="900"/>
+                <a:spcPts val="800"/>
               </a:spcAft>
               <a:buSzPct val="100000"/>
               <a:buChar char="•"/>
             </a:pPr>
             <a:r>
-              <a:rPr lang="en-US" sz="1350" dirty="0">
+              <a:rPr lang="en-US" sz="1300" dirty="0">
                 <a:solidFill>
                   <a:srgbClr val="3C444C"/>
                 </a:solidFill>
@@ -8104,9 +8104,9 @@
                 <a:ea typeface="Calibri" pitchFamily="34" charset="-122"/>
                 <a:cs typeface="Calibri" pitchFamily="34" charset="-120"/>
               </a:rPr>
-              <a:t>It recovered within minutes, once the agency said it was false.</a:t>
-            </a:r>
-            <a:endParaRPr lang="en-US" sz="1350" dirty="0"/>
+              <a:t>The stock market dropped sharply within seconds, then recovered within minutes once the AP said the post was false.</a:t>
+            </a:r>
+            <a:endParaRPr lang="en-US" sz="1300" dirty="0"/>
           </a:p>
         </p:txBody>
       </p:sp>
@@ -8214,7 +8214,7 @@
               <a:buNone/>
             </a:pPr>
             <a:r>
-              <a:rPr lang="en-US" sz="1000" dirty="0">
+              <a:rPr lang="en-US" sz="950" dirty="0">
                 <a:solidFill>
                   <a:srgbClr val="3C444C"/>
                 </a:solidFill>
@@ -8222,9 +8222,9 @@
                 <a:ea typeface="Courier New" pitchFamily="34" charset="-122"/>
                 <a:cs typeface="Courier New" pitchFamily="34" charset="-120"/>
               </a:rPr>
-              <a:t>to fall</a:t>
-            </a:r>
-            <a:endParaRPr lang="en-US" sz="1000" dirty="0"/>
+              <a:t>for the market to fall</a:t>
+            </a:r>
+            <a:endParaRPr lang="en-US" sz="950" dirty="0"/>
           </a:p>
         </p:txBody>
       </p:sp>
@@ -8298,7 +8298,7 @@
               <a:buNone/>
             </a:pPr>
             <a:r>
-              <a:rPr lang="en-US" sz="1000" dirty="0">
+              <a:rPr lang="en-US" sz="950" dirty="0">
                 <a:solidFill>
                   <a:srgbClr val="3C444C"/>
                 </a:solidFill>
@@ -8306,9 +8306,9 @@
                 <a:ea typeface="Courier New" pitchFamily="34" charset="-122"/>
                 <a:cs typeface="Courier New" pitchFamily="34" charset="-120"/>
               </a:rPr>
-              <a:t>to recover</a:t>
-            </a:r>
-            <a:endParaRPr lang="en-US" sz="1000" dirty="0"/>
+              <a:t>for it to recover</a:t>
+            </a:r>
+            <a:endParaRPr lang="en-US" sz="950" dirty="0"/>
           </a:p>
         </p:txBody>
       </p:sp>
@@ -8348,7 +8348,7 @@
                 <a:ea typeface="Calibri" pitchFamily="34" charset="-122"/>
                 <a:cs typeface="Calibri" pitchFamily="34" charset="-120"/>
               </a:rPr>
-              <a:t>A friend forwarding something they believe and an account built to deceive are different problems, even when the words are the same.</a:t>
+              <a:t>The post spread because people trusted the account, not because anyone had checked the story.</a:t>
             </a:r>
             <a:endParaRPr lang="en-US" sz="1350" dirty="0"/>
           </a:p>
@@ -8500,7 +8500,7 @@
                 <a:ea typeface="Cambria" pitchFamily="34" charset="-122"/>
                 <a:cs typeface="Cambria" pitchFamily="34" charset="-120"/>
               </a:rPr>
-              <a:t>The four tactics</a:t>
+              <a:t>Four tactics that spread false information</a:t>
             </a:r>
             <a:endParaRPr lang="en-US" sz="3000" dirty="0"/>
           </a:p>
@@ -8682,7 +8682,7 @@
                 <a:ea typeface="Calibri" pitchFamily="34" charset="-122"/>
                 <a:cs typeface="Calibri" pitchFamily="34" charset="-120"/>
               </a:rPr>
-              <a:t>A headline written to get the click rather than to tell you what happened. Nobody has to intend to mislead.</a:t>
+              <a:t>A headline written to make you click, rather than to tell you what happened.</a:t>
             </a:r>
             <a:endParaRPr lang="en-US" sz="1250" dirty="0"/>
           </a:p>
@@ -8864,7 +8864,7 @@
                 <a:ea typeface="Calibri" pitchFamily="34" charset="-122"/>
                 <a:cs typeface="Calibri" pitchFamily="34" charset="-120"/>
               </a:rPr>
-              <a:t>Video or audio of a real person, made by software, saying what they never said. Peele and BuzzFeed, 2018.</a:t>
+              <a:t>Video or audio of a real person, made by software, saying something they never said.</a:t>
             </a:r>
             <a:endParaRPr lang="en-US" sz="1250" dirty="0"/>
           </a:p>
@@ -9046,7 +9046,7 @@
                 <a:ea typeface="Calibri" pitchFamily="34" charset="-122"/>
                 <a:cs typeface="Calibri" pitchFamily="34" charset="-120"/>
               </a:rPr>
-              <a:t>Automated accounts. Not there to persuade you, there to make a claim look popular.</a:t>
+              <a:t>Automated accounts. Their job is to make a claim look popular.</a:t>
             </a:r>
             <a:endParaRPr lang="en-US" sz="1250" dirty="0"/>
           </a:p>
@@ -9228,7 +9228,7 @@
                 <a:ea typeface="Calibri" pitchFamily="34" charset="-122"/>
                 <a:cs typeface="Calibri" pitchFamily="34" charset="-120"/>
               </a:rPr>
-              <a:t>Anger, fear and outrage get shared far more than anything that makes you think. This one carries the other three.</a:t>
+              <a:t>Posts that make people angry or afraid are shared far more than posts that make people think.</a:t>
             </a:r>
             <a:endParaRPr lang="en-US" sz="1250" dirty="0"/>
           </a:p>
@@ -9270,7 +9270,7 @@
                 <a:ea typeface="Cambria" pitchFamily="34" charset="-122"/>
                 <a:cs typeface="Cambria" pitchFamily="34" charset="-120"/>
               </a:rPr>
-              <a:t>Every one of the four is aimed at a feeling rather than at your reasoning.</a:t>
+              <a:t>All four aim at your emotions rather than at your reasoning.</a:t>
             </a:r>
             <a:endParaRPr lang="en-US" sz="1600" dirty="0"/>
           </a:p>
@@ -9380,7 +9380,7 @@
                 <a:ea typeface="Courier New" pitchFamily="34" charset="-122"/>
                 <a:cs typeface="Courier New" pitchFamily="34" charset="-120"/>
               </a:rPr>
-              <a:t>PART TWO · PUT IT NEXT TO TOPIC 3</a:t>
+              <a:t>PART TWO · BACK TO TOPIC 3</a:t>
             </a:r>
             <a:endParaRPr lang="en-US" sz="1000" dirty="0"/>
           </a:p>
@@ -9422,7 +9422,7 @@
                 <a:ea typeface="Cambria" pitchFamily="34" charset="-122"/>
                 <a:cs typeface="Cambria" pitchFamily="34" charset="-120"/>
               </a:rPr>
-              <a:t>Nobody has to decide to promote a lie</a:t>
+              <a:t>The system spreads it without meaning to</a:t>
             </a:r>
             <a:endParaRPr lang="en-US" sz="3000" dirty="0"/>
           </a:p>
@@ -9498,7 +9498,7 @@
                 <a:ea typeface="Calibri" pitchFamily="34" charset="-122"/>
                 <a:cs typeface="Calibri" pitchFamily="34" charset="-120"/>
               </a:rPr>
-              <a:t>The system rewards reaction.</a:t>
+              <a:t>The feed rewards reaction.</a:t>
             </a:r>
             <a:endParaRPr lang="en-US" sz="1350" dirty="0"/>
           </a:p>
@@ -9616,7 +9616,7 @@
                 <a:ea typeface="Calibri" pitchFamily="34" charset="-122"/>
                 <a:cs typeface="Calibri" pitchFamily="34" charset="-120"/>
               </a:rPr>
-              <a:t>Sensational content produces reaction.</a:t>
+              <a:t>Emotional posts get the most reaction.</a:t>
             </a:r>
             <a:endParaRPr lang="en-US" sz="1350" dirty="0"/>
           </a:p>
@@ -9734,7 +9734,7 @@
                 <a:ea typeface="Calibri" pitchFamily="34" charset="-122"/>
                 <a:cs typeface="Calibri" pitchFamily="34" charset="-120"/>
               </a:rPr>
-              <a:t>Sensational content gets promoted.</a:t>
+              <a:t>So the feed shows those posts to more people.</a:t>
             </a:r>
             <a:endParaRPr lang="en-US" sz="1350" dirty="0"/>
           </a:p>
@@ -9810,7 +9810,7 @@
                 <a:ea typeface="Cambria" pitchFamily="34" charset="-122"/>
                 <a:cs typeface="Cambria" pitchFamily="34" charset="-120"/>
               </a:rPr>
-              <a:t>A system built to maximize reaction will amplify whatever produces the most reaction, and truth is not what that number measures.</a:t>
+              <a:t>No employee decides to spread a lie. The system measures reaction, and reaction is not the same thing as truth.</a:t>
             </a:r>
             <a:endParaRPr lang="en-US" sz="1650" dirty="0"/>
           </a:p>
@@ -9852,7 +9852,7 @@
                 <a:ea typeface="Calibri" pitchFamily="34" charset="-122"/>
                 <a:cs typeface="Calibri" pitchFamily="34" charset="-120"/>
               </a:rPr>
-              <a:t>Naming the feeling is the counter. "This is built to make me angry" is a complete defense, and it takes four seconds.</a:t>
+              <a:t>Naming the emotion is a defense. Saying "this post is built to make me angry" takes about four seconds.</a:t>
             </a:r>
             <a:endParaRPr lang="en-US" sz="1350" dirty="0"/>
           </a:p>
@@ -10004,7 +10004,7 @@
                 <a:ea typeface="Cambria" pitchFamily="34" charset="-122"/>
                 <a:cs typeface="Cambria" pitchFamily="34" charset="-120"/>
               </a:rPr>
-              <a:t>It is not the bots. It is us.</a:t>
+              <a:t>Who spreads false stories? People do.</a:t>
             </a:r>
             <a:endParaRPr lang="en-US" sz="3000" dirty="0"/>
           </a:p>
@@ -10084,7 +10084,7 @@
                 <a:ea typeface="Calibri" pitchFamily="34" charset="-122"/>
                 <a:cs typeface="Calibri" pitchFamily="34" charset="-120"/>
               </a:rPr>
-              <a:t>In 2018, Vosoughi, Roy and Aral at MIT published a study in Science following roughly 126,000 rumor cascades on Twitter over eleven years.</a:t>
+              <a:t>In 2018, three researchers at MIT studied about 126,000 rumors on Twitter over eleven years.</a:t>
             </a:r>
             <a:endParaRPr lang="en-US" sz="1300" dirty="0"/>
           </a:p>
@@ -10108,7 +10108,7 @@
                 <a:ea typeface="Calibri" pitchFamily="34" charset="-122"/>
                 <a:cs typeface="Calibri" pitchFamily="34" charset="-120"/>
               </a:rPr>
-              <a:t>False stories spread farther, faster, and to more people than true ones. It was not close.</a:t>
+              <a:t>False stories reached more people, and reached them faster, than true stories did.</a:t>
             </a:r>
             <a:endParaRPr lang="en-US" sz="1300" dirty="0"/>
           </a:p>
@@ -10132,7 +10132,7 @@
                 <a:ea typeface="Calibri" pitchFamily="34" charset="-122"/>
                 <a:cs typeface="Calibri" pitchFamily="34" charset="-120"/>
               </a:rPr>
-              <a:t>Then they removed all the bot activity and ran it again. The finding held.</a:t>
+              <a:t>The researchers then removed every automated account and repeated the study. The result did not change.</a:t>
             </a:r>
             <a:endParaRPr lang="en-US" sz="1300" dirty="0"/>
           </a:p>
@@ -10250,7 +10250,7 @@
                 <a:ea typeface="Courier New" pitchFamily="34" charset="-122"/>
                 <a:cs typeface="Courier New" pitchFamily="34" charset="-120"/>
               </a:rPr>
-              <a:t>RUMOR CASCADES  ·  11 YEARS</a:t>
+              <a:t>RUMORS  ·  11 YEARS</a:t>
             </a:r>
             <a:endParaRPr lang="en-US" sz="900" dirty="0"/>
           </a:p>
@@ -10265,7 +10265,7 @@
         <p:spPr>
           <a:xfrm>
             <a:off x="5650992" y="2743200"/>
-            <a:ext cx="2688336" cy="548640"/>
+            <a:ext cx="2688336" cy="731520"/>
           </a:xfrm>
           <a:prstGeom prst="rect">
             <a:avLst/>
@@ -10284,7 +10284,7 @@
               <a:buNone/>
             </a:pPr>
             <a:r>
-              <a:rPr lang="en-US" sz="1700" b="1" dirty="0">
+              <a:rPr lang="en-US" sz="1600" b="1" dirty="0">
                 <a:solidFill>
                   <a:srgbClr val="14171A"/>
                 </a:solidFill>
@@ -10292,9 +10292,9 @@
                 <a:ea typeface="Cambria" pitchFamily="34" charset="-122"/>
                 <a:cs typeface="Cambria" pitchFamily="34" charset="-120"/>
               </a:rPr>
-              <a:t>Humans did the spreading.</a:t>
-            </a:r>
-            <a:endParaRPr lang="en-US" sz="1700" dirty="0"/>
+              <a:t>People did the spreading, not bots.</a:t>
+            </a:r>
+            <a:endParaRPr lang="en-US" sz="1600" dirty="0"/>
           </a:p>
         </p:txBody>
       </p:sp>
@@ -10334,7 +10334,7 @@
                 <a:ea typeface="Calibri" pitchFamily="34" charset="-122"/>
                 <a:cs typeface="Calibri" pitchFamily="34" charset="-120"/>
               </a:rPr>
-              <a:t>Their explanation was novelty and emotional response. False stories are newer, because they are not constrained by having happened, and novelty is what people forward.</a:t>
+              <a:t>The researchers explained it this way: false stories are newer, because a true story has to have actually happened. New information is what people pass along.</a:t>
             </a:r>
             <a:endParaRPr lang="en-US" sz="1300" dirty="0"/>
           </a:p>
@@ -10376,7 +10376,7 @@
                 <a:ea typeface="Calibri" pitchFamily="34" charset="-122"/>
                 <a:cs typeface="Calibri" pitchFamily="34" charset="-120"/>
               </a:rPr>
-              <a:t>So the fix is mostly not technical. It is the two seconds before you repost.</a:t>
+              <a:t>So the main fix is not a technical one. It is the pause before you share.</a:t>
             </a:r>
             <a:endParaRPr lang="en-US" sz="1400" dirty="0"/>
           </a:p>
@@ -10486,7 +10486,7 @@
                 <a:ea typeface="Courier New" pitchFamily="34" charset="-122"/>
                 <a:cs typeface="Courier New" pitchFamily="34" charset="-120"/>
               </a:rPr>
-              <a:t>PART THREE · THE MOTIVE</a:t>
+              <a:t>PART THREE · TWO EXAMPLES</a:t>
             </a:r>
             <a:endParaRPr lang="en-US" sz="1000" dirty="0"/>
           </a:p>
@@ -10528,7 +10528,7 @@
                 <a:ea typeface="Cambria" pitchFamily="34" charset="-122"/>
                 <a:cs typeface="Cambria" pitchFamily="34" charset="-120"/>
               </a:rPr>
-              <a:t>Often money rather than politics</a:t>
+              <a:t>The motive is often money</a:t>
             </a:r>
             <a:endParaRPr lang="en-US" sz="3000" dirty="0"/>
           </a:p>
@@ -10646,7 +10646,7 @@
                 <a:ea typeface="Calibri" pitchFamily="34" charset="-122"/>
                 <a:cs typeface="Calibri" pitchFamily="34" charset="-120"/>
               </a:rPr>
-              <a:t>BuzzFeed News traced a cluster of American political hoax sites to one town, run largely by young people who had found that sensational American politics paid well in advertising.</a:t>
+              <a:t>Reporters found that a group of websites publishing false American political stories were run from a single town. The people running them earned advertising money from the traffic.</a:t>
             </a:r>
             <a:endParaRPr lang="en-US" sz="1250" dirty="0"/>
           </a:p>
@@ -10675,7 +10675,7 @@
                 <a:ea typeface="Calibri" pitchFamily="34" charset="-122"/>
                 <a:cs typeface="Calibri" pitchFamily="34" charset="-120"/>
               </a:rPr>
-              <a:t>In the last three months of that campaign, the top false election stories drew more Facebook engagement than the top real ones.</a:t>
+              <a:t>In the last three months of that campaign, the most popular false election stories got more engagement on Facebook than the most popular true ones.</a:t>
             </a:r>
             <a:endParaRPr lang="en-US" sz="1250" dirty="0"/>
           </a:p>
@@ -10793,7 +10793,7 @@
                 <a:ea typeface="Calibri" pitchFamily="34" charset="-122"/>
                 <a:cs typeface="Calibri" pitchFamily="34" charset="-120"/>
               </a:rPr>
-              <a:t>A claim that a child trafficking operation was run out of a Washington DC restaurant. There was nothing to it at all.</a:t>
+              <a:t>A false story claimed that a crime ring was operating out of a restaurant in Washington DC. There was no evidence for it.</a:t>
             </a:r>
             <a:endParaRPr lang="en-US" sz="1250" dirty="0"/>
           </a:p>
@@ -10822,7 +10822,7 @@
                 <a:ea typeface="Calibri" pitchFamily="34" charset="-122"/>
                 <a:cs typeface="Calibri" pitchFamily="34" charset="-120"/>
               </a:rPr>
-              <a:t>In December 2016 a man drove there from another state and fired a rifle inside the building. Nobody was hurt, which was luck.</a:t>
+              <a:t>In December 2016 a man drove to that restaurant from another state and fired a rifle inside the building. No one was hurt.</a:t>
             </a:r>
             <a:endParaRPr lang="en-US" sz="1250" dirty="0"/>
           </a:p>
@@ -10932,7 +10932,7 @@
               <a:buNone/>
             </a:pPr>
             <a:r>
-              <a:rPr lang="en-US" sz="1250" dirty="0">
+              <a:rPr lang="en-US" sz="1200" dirty="0">
                 <a:solidFill>
                   <a:srgbClr val="14171A"/>
                 </a:solidFill>
@@ -10940,9 +10940,9 @@
                 <a:ea typeface="Calibri" pitchFamily="34" charset="-122"/>
                 <a:cs typeface="Calibri" pitchFamily="34" charset="-120"/>
               </a:rPr>
-              <a:t>"It was bots" and "it was foreign interference" are both real and both comfortable: they put the problem outside the room.</a:t>
-            </a:r>
-            <a:endParaRPr lang="en-US" sz="1250" dirty="0"/>
+              <a:t>Blaming bots or foreign governments is easy, because it places the problem outside our own behavior. Most sharing is done by ordinary people who did not check.</a:t>
+            </a:r>
+            <a:endParaRPr lang="en-US" sz="1200" dirty="0"/>
           </a:p>
         </p:txBody>
       </p:sp>

--- a/social-media/decks/topic-05-how-a-lie-travels.pptx
+++ b/social-media/decks/topic-05-how-a-lie-travels.pptx
@@ -2186,7 +2186,7 @@
         <p:spPr>
           <a:xfrm>
             <a:off x="548640" y="2286000"/>
-            <a:ext cx="6858000" cy="457200"/>
+            <a:ext cx="6949440" cy="822960"/>
           </a:xfrm>
           <a:prstGeom prst="rect">
             <a:avLst/>
@@ -2200,12 +2200,12 @@
           <a:p>
             <a:pPr algn="l" indent="0" marL="0">
               <a:lnSpc>
-                <a:spcPct val="106000"/>
-              </a:lnSpc>
-              <a:buNone/>
-            </a:pPr>
-            <a:r>
-              <a:rPr lang="en-US" sz="1800" i="1" dirty="0">
+                <a:spcPct val="115000"/>
+              </a:lnSpc>
+              <a:buNone/>
+            </a:pPr>
+            <a:r>
+              <a:rPr lang="en-US" sz="1700" i="1" dirty="0">
                 <a:solidFill>
                   <a:srgbClr val="A8B2BA"/>
                 </a:solidFill>
@@ -2213,9 +2213,9 @@
                 <a:ea typeface="Cambria" pitchFamily="34" charset="-122"/>
                 <a:cs typeface="Cambria" pitchFamily="34" charset="-120"/>
               </a:rPr>
-              <a:t>Why false stories spread faster than corrections do.</a:t>
-            </a:r>
-            <a:endParaRPr lang="en-US" sz="1800" dirty="0"/>
+              <a:t>False stories often spread faster than the corrections that follow them. This reading explains why that happens, and what to do about it.</a:t>
+            </a:r>
+            <a:endParaRPr lang="en-US" sz="1700" dirty="0"/>
           </a:p>
         </p:txBody>
       </p:sp>
@@ -3919,7 +3919,7 @@
               <a:buNone/>
             </a:pPr>
             <a:r>
-              <a:rPr lang="en-US" sz="3000" b="1" dirty="0">
+              <a:rPr lang="en-US" sz="2800" b="1" dirty="0">
                 <a:solidFill>
                   <a:srgbClr val="14171A"/>
                 </a:solidFill>
@@ -3927,9 +3927,9 @@
                 <a:ea typeface="Cambria" pitchFamily="34" charset="-122"/>
                 <a:cs typeface="Cambria" pitchFamily="34" charset="-120"/>
               </a:rPr>
-              <a:t>In an election, these appear together</a:t>
-            </a:r>
-            <a:endParaRPr lang="en-US" sz="3000" dirty="0"/>
+              <a:t>Elections, where all of it appears at once</a:t>
+            </a:r>
+            <a:endParaRPr lang="en-US" sz="2800" dirty="0"/>
           </a:p>
         </p:txBody>
       </p:sp>
@@ -5494,7 +5494,7 @@
                 <a:ea typeface="Calibri" pitchFamily="34" charset="-122"/>
                 <a:cs typeface="Calibri" pitchFamily="34" charset="-120"/>
               </a:rPr>
-              <a:t>Describe one post you saw this week that produced a strong emotion. Name the emotion, then explain how it made people more likely to share the post.</a:t>
+              <a:t>Describe one post you saw this week that gave you a strong emotional reaction. Name the emotion, then explain how that emotion made people more likely to share the post.</a:t>
             </a:r>
             <a:endParaRPr lang="en-US" sz="1200" dirty="0"/>
           </a:p>
@@ -5642,7 +5642,7 @@
                 <a:ea typeface="Calibri" pitchFamily="34" charset="-122"/>
                 <a:cs typeface="Calibri" pitchFamily="34" charset="-120"/>
               </a:rPr>
-              <a:t>Choose one claim you are unsure about and check it using lateral reading. Write down who published it, when, and whether another source reports it.</a:t>
+              <a:t>Choose one claim you are unsure about and check it using lateral reading. Write down what you did: who published it, when it was published, and whether any other source reports it.</a:t>
             </a:r>
             <a:endParaRPr lang="en-US" sz="1200" dirty="0"/>
           </a:p>
@@ -6086,11 +6086,11 @@
                 <a:solidFill>
                   <a:srgbClr val="14171A"/>
                 </a:solidFill>
-                <a:latin typeface="Courier New" pitchFamily="34" charset="0"/>
-                <a:ea typeface="Courier New" pitchFamily="34" charset="-122"/>
-                <a:cs typeface="Courier New" pitchFamily="34" charset="-120"/>
-              </a:rPr>
-              <a:t>Topic 1</a:t>
+                <a:latin typeface="Calibri" pitchFamily="34" charset="0"/>
+                <a:ea typeface="Calibri" pitchFamily="34" charset="-122"/>
+                <a:cs typeface="Calibri" pitchFamily="34" charset="-120"/>
+              </a:rPr>
+              <a:t>Where the Money Comes From</a:t>
             </a:r>
             <a:endParaRPr lang="en-US" sz="1200" dirty="0"/>
           </a:p>
@@ -6234,11 +6234,11 @@
                 <a:solidFill>
                   <a:srgbClr val="14171A"/>
                 </a:solidFill>
-                <a:latin typeface="Courier New" pitchFamily="34" charset="0"/>
-                <a:ea typeface="Courier New" pitchFamily="34" charset="-122"/>
-                <a:cs typeface="Courier New" pitchFamily="34" charset="-120"/>
-              </a:rPr>
-              <a:t>Topic 3</a:t>
+                <a:latin typeface="Calibri" pitchFamily="34" charset="0"/>
+                <a:ea typeface="Calibri" pitchFamily="34" charset="-122"/>
+                <a:cs typeface="Calibri" pitchFamily="34" charset="-120"/>
+              </a:rPr>
+              <a:t>Inside the Algorithm Box</a:t>
             </a:r>
             <a:endParaRPr lang="en-US" sz="1200" dirty="0"/>
           </a:p>
@@ -6382,11 +6382,11 @@
                 <a:solidFill>
                   <a:srgbClr val="14171A"/>
                 </a:solidFill>
-                <a:latin typeface="Courier New" pitchFamily="34" charset="0"/>
-                <a:ea typeface="Courier New" pitchFamily="34" charset="-122"/>
-                <a:cs typeface="Courier New" pitchFamily="34" charset="-120"/>
-              </a:rPr>
-              <a:t>Topic 5</a:t>
+                <a:latin typeface="Calibri" pitchFamily="34" charset="0"/>
+                <a:ea typeface="Calibri" pitchFamily="34" charset="-122"/>
+                <a:cs typeface="Calibri" pitchFamily="34" charset="-120"/>
+              </a:rPr>
+              <a:t>How a Lie Travels</a:t>
             </a:r>
             <a:endParaRPr lang="en-US" sz="1200" dirty="0"/>
           </a:p>
